--- a/topic06-structuring-programs/unit-06a-lectures/talk-2/b-stack.pptx
+++ b/topic06-structuring-programs/unit-06a-lectures/talk-2/b-stack.pptx
@@ -531,14 +531,14 @@
           </a:ln>
           <a:extLst>
             <a:ext uri="{909E8E84-426E-40dd-AFC4-6F175D3DCCD1}">
-              <a14:hiddenFill xmlns:a14="http://schemas.microsoft.com/office/drawing/2010/main" xmlns="">
+              <a14:hiddenFill xmlns="" xmlns:a14="http://schemas.microsoft.com/office/drawing/2010/main">
                 <a:solidFill>
                   <a:srgbClr val="FFFFFF"/>
                 </a:solidFill>
               </a14:hiddenFill>
             </a:ext>
             <a:ext uri="{FAA26D3D-D897-4be2-8F04-BA451C77F1D7}">
-              <ma14:placeholderFlag xmlns:ma14="http://schemas.microsoft.com/office/mac/drawingml/2011/main" xmlns="" val="1"/>
+              <ma14:placeholderFlag xmlns="" xmlns:ma14="http://schemas.microsoft.com/office/mac/drawingml/2011/main" val="1"/>
             </a:ext>
           </a:extLst>
         </p:spPr>
@@ -1116,7 +1116,7 @@
             <a:fld id="{08B9EBBA-996F-894A-B54A-D6246ED52CEA}" type="datetimeFigureOut">
               <a:rPr lang="en-US" smtClean="0"/>
               <a:pPr/>
-              <a:t>2/27/25</a:t>
+              <a:t>2/19/26</a:t>
             </a:fld>
             <a:endParaRPr lang="en-US" dirty="0"/>
           </a:p>
@@ -1538,7 +1538,7 @@
             <a:fld id="{09B482E8-6E0E-1B4F-B1FD-C69DB9E858D9}" type="datetimeFigureOut">
               <a:rPr lang="en-US" smtClean="0"/>
               <a:pPr/>
-              <a:t>2/27/25</a:t>
+              <a:t>2/19/26</a:t>
             </a:fld>
             <a:endParaRPr lang="en-US" dirty="0"/>
           </a:p>
@@ -1882,7 +1882,7 @@
             <a:fld id="{09B482E8-6E0E-1B4F-B1FD-C69DB9E858D9}" type="datetimeFigureOut">
               <a:rPr lang="en-US" smtClean="0"/>
               <a:pPr/>
-              <a:t>2/27/25</a:t>
+              <a:t>2/19/26</a:t>
             </a:fld>
             <a:endParaRPr lang="en-US" dirty="0"/>
           </a:p>
@@ -2295,7 +2295,7 @@
             <a:fld id="{09B482E8-6E0E-1B4F-B1FD-C69DB9E858D9}" type="datetimeFigureOut">
               <a:rPr lang="en-US" smtClean="0"/>
               <a:pPr/>
-              <a:t>2/27/25</a:t>
+              <a:t>2/19/26</a:t>
             </a:fld>
             <a:endParaRPr lang="en-US" dirty="0"/>
           </a:p>
@@ -2871,7 +2871,7 @@
             <a:fld id="{09B482E8-6E0E-1B4F-B1FD-C69DB9E858D9}" type="datetimeFigureOut">
               <a:rPr lang="en-US" smtClean="0"/>
               <a:pPr/>
-              <a:t>2/27/25</a:t>
+              <a:t>2/19/26</a:t>
             </a:fld>
             <a:endParaRPr lang="en-US" dirty="0"/>
           </a:p>
@@ -3560,7 +3560,7 @@
             <a:fld id="{09B482E8-6E0E-1B4F-B1FD-C69DB9E858D9}" type="datetimeFigureOut">
               <a:rPr lang="en-US" smtClean="0"/>
               <a:pPr/>
-              <a:t>2/27/25</a:t>
+              <a:t>2/19/26</a:t>
             </a:fld>
             <a:endParaRPr lang="en-US" dirty="0"/>
           </a:p>
@@ -4481,7 +4481,7 @@
             <a:fld id="{09B482E8-6E0E-1B4F-B1FD-C69DB9E858D9}" type="datetimeFigureOut">
               <a:rPr lang="en-US" smtClean="0"/>
               <a:pPr/>
-              <a:t>2/27/25</a:t>
+              <a:t>2/19/26</a:t>
             </a:fld>
             <a:endParaRPr lang="en-US" dirty="0"/>
           </a:p>
@@ -4802,7 +4802,7 @@
             <a:fld id="{09B482E8-6E0E-1B4F-B1FD-C69DB9E858D9}" type="datetimeFigureOut">
               <a:rPr lang="en-US" smtClean="0"/>
               <a:pPr/>
-              <a:t>2/27/25</a:t>
+              <a:t>2/19/26</a:t>
             </a:fld>
             <a:endParaRPr lang="en-US" dirty="0"/>
           </a:p>
@@ -5073,7 +5073,7 @@
             <a:fld id="{09B482E8-6E0E-1B4F-B1FD-C69DB9E858D9}" type="datetimeFigureOut">
               <a:rPr lang="en-US" smtClean="0"/>
               <a:pPr/>
-              <a:t>2/27/25</a:t>
+              <a:t>2/19/26</a:t>
             </a:fld>
             <a:endParaRPr lang="en-US" dirty="0"/>
           </a:p>
@@ -5403,7 +5403,7 @@
             <a:fld id="{09B482E8-6E0E-1B4F-B1FD-C69DB9E858D9}" type="datetimeFigureOut">
               <a:rPr lang="en-US" smtClean="0"/>
               <a:pPr/>
-              <a:t>2/27/25</a:t>
+              <a:t>2/19/26</a:t>
             </a:fld>
             <a:endParaRPr lang="en-US" dirty="0"/>
           </a:p>
@@ -5799,7 +5799,7 @@
             <a:fld id="{8DFA1846-DA80-1C48-A609-854EA85C59AD}" type="datetimeFigureOut">
               <a:rPr lang="en-US" smtClean="0"/>
               <a:pPr/>
-              <a:t>2/27/25</a:t>
+              <a:t>2/19/26</a:t>
             </a:fld>
             <a:endParaRPr lang="en-US" dirty="0"/>
           </a:p>
@@ -6182,7 +6182,7 @@
             <a:fld id="{09B482E8-6E0E-1B4F-B1FD-C69DB9E858D9}" type="datetimeFigureOut">
               <a:rPr lang="en-US" smtClean="0"/>
               <a:pPr/>
-              <a:t>2/27/25</a:t>
+              <a:t>2/19/26</a:t>
             </a:fld>
             <a:endParaRPr lang="en-US" dirty="0"/>
           </a:p>
@@ -6695,7 +6695,7 @@
             <a:fld id="{09B482E8-6E0E-1B4F-B1FD-C69DB9E858D9}" type="datetimeFigureOut">
               <a:rPr lang="en-US" smtClean="0"/>
               <a:pPr/>
-              <a:t>2/27/25</a:t>
+              <a:t>2/19/26</a:t>
             </a:fld>
             <a:endParaRPr lang="en-US" dirty="0"/>
           </a:p>
@@ -6959,7 +6959,7 @@
             <a:fld id="{F13A34C8-038E-2045-AF43-DF7DBB8E0E9E}" type="datetimeFigureOut">
               <a:rPr lang="en-US" smtClean="0"/>
               <a:pPr/>
-              <a:t>2/27/25</a:t>
+              <a:t>2/19/26</a:t>
             </a:fld>
             <a:endParaRPr lang="en-US" dirty="0"/>
           </a:p>
@@ -7110,6 +7110,13 @@
             <a:schemeClr val="lt1"/>
           </a:fontRef>
         </p:style>
+        <p:txBody>
+          <a:bodyPr/>
+          <a:lstStyle/>
+          <a:p>
+            <a:endParaRPr lang="en-US"/>
+          </a:p>
+        </p:txBody>
       </p:sp>
       <p:sp>
         <p:nvSpPr>
@@ -7129,7 +7136,7 @@
             <a:fld id="{8818C68F-D26B-8F47-958C-23B49CF8A634}" type="datetimeFigureOut">
               <a:rPr lang="en-US" smtClean="0"/>
               <a:pPr/>
-              <a:t>2/27/25</a:t>
+              <a:t>2/19/26</a:t>
             </a:fld>
             <a:endParaRPr lang="en-US" dirty="0"/>
           </a:p>
@@ -7526,7 +7533,7 @@
             <a:fld id="{09B482E8-6E0E-1B4F-B1FD-C69DB9E858D9}" type="datetimeFigureOut">
               <a:rPr lang="en-US" smtClean="0"/>
               <a:pPr/>
-              <a:t>2/27/25</a:t>
+              <a:t>2/19/26</a:t>
             </a:fld>
             <a:endParaRPr lang="en-US" dirty="0"/>
           </a:p>
@@ -7942,7 +7949,7 @@
             <a:fld id="{09B482E8-6E0E-1B4F-B1FD-C69DB9E858D9}" type="datetimeFigureOut">
               <a:rPr lang="en-US" smtClean="0"/>
               <a:pPr/>
-              <a:t>2/27/25</a:t>
+              <a:t>2/19/26</a:t>
             </a:fld>
             <a:endParaRPr lang="en-US" dirty="0"/>
           </a:p>
@@ -8193,7 +8200,7 @@
             <a:fld id="{09B482E8-6E0E-1B4F-B1FD-C69DB9E858D9}" type="datetimeFigureOut">
               <a:rPr lang="en-US" smtClean="0"/>
               <a:pPr/>
-              <a:t>2/27/25</a:t>
+              <a:t>2/19/26</a:t>
             </a:fld>
             <a:endParaRPr lang="en-US" dirty="0"/>
           </a:p>
@@ -8630,14 +8637,14 @@
           <a:noFill/>
           <a:extLst>
             <a:ext uri="{909E8E84-426E-40dd-AFC4-6F175D3DCCD1}">
-              <a14:hiddenFill xmlns:a14="http://schemas.microsoft.com/office/drawing/2010/main" xmlns="">
+              <a14:hiddenFill xmlns="" xmlns:a14="http://schemas.microsoft.com/office/drawing/2010/main">
                 <a:solidFill>
                   <a:srgbClr val="FFFFFF"/>
                 </a:solidFill>
               </a14:hiddenFill>
             </a:ext>
             <a:ext uri="{91240B29-F687-4f45-9708-019B960494DF}">
-              <a14:hiddenLine xmlns:a14="http://schemas.microsoft.com/office/drawing/2010/main" xmlns="" w="9525">
+              <a14:hiddenLine xmlns="" xmlns:a14="http://schemas.microsoft.com/office/drawing/2010/main" w="9525">
                 <a:solidFill>
                   <a:srgbClr val="000000"/>
                 </a:solidFill>
@@ -8845,7 +8852,7 @@
               <a:rPr kumimoji="1" lang="en-US" sz="3200" dirty="0">
                 <a:cs typeface="+mn-cs"/>
               </a:rPr>
-              <a:t>Chapter 6.2 – The Stack Tool</a:t>
+              <a:t>Topic 6.2 – The Stack Tool</a:t>
             </a:r>
           </a:p>
         </p:txBody>
@@ -8885,14 +8892,14 @@
           </a:ln>
           <a:extLst>
             <a:ext uri="{909E8E84-426E-40dd-AFC4-6F175D3DCCD1}">
-              <a14:hiddenFill xmlns:a14="http://schemas.microsoft.com/office/drawing/2010/main" xmlns="">
+              <a14:hiddenFill xmlns="" xmlns:a14="http://schemas.microsoft.com/office/drawing/2010/main">
                 <a:solidFill>
                   <a:srgbClr val="FFFFFF"/>
                 </a:solidFill>
               </a14:hiddenFill>
             </a:ext>
             <a:ext uri="{91240B29-F687-4f45-9708-019B960494DF}">
-              <a14:hiddenLine xmlns:a14="http://schemas.microsoft.com/office/drawing/2010/main" xmlns="" w="9525">
+              <a14:hiddenLine xmlns="" xmlns:a14="http://schemas.microsoft.com/office/drawing/2010/main" w="9525">
                 <a:solidFill>
                   <a:srgbClr val="000000"/>
                 </a:solidFill>
@@ -8973,14 +8980,14 @@
           <a:noFill/>
           <a:extLst>
             <a:ext uri="{909E8E84-426E-40dd-AFC4-6F175D3DCCD1}">
-              <a14:hiddenFill xmlns:a14="http://schemas.microsoft.com/office/drawing/2010/main" xmlns="">
+              <a14:hiddenFill xmlns="" xmlns:a14="http://schemas.microsoft.com/office/drawing/2010/main">
                 <a:solidFill>
                   <a:srgbClr val="FFFFFF"/>
                 </a:solidFill>
               </a14:hiddenFill>
             </a:ext>
             <a:ext uri="{91240B29-F687-4f45-9708-019B960494DF}">
-              <a14:hiddenLine xmlns:a14="http://schemas.microsoft.com/office/drawing/2010/main" xmlns="" w="9525">
+              <a14:hiddenLine xmlns="" xmlns:a14="http://schemas.microsoft.com/office/drawing/2010/main" w="9525">
                 <a:solidFill>
                   <a:srgbClr val="000000"/>
                 </a:solidFill>
@@ -9262,14 +9269,14 @@
           <a:ln/>
           <a:extLst>
             <a:ext uri="{909E8E84-426E-40dd-AFC4-6F175D3DCCD1}">
-              <a14:hiddenFill xmlns:a14="http://schemas.microsoft.com/office/drawing/2010/main" xmlns="">
+              <a14:hiddenFill xmlns="" xmlns:a14="http://schemas.microsoft.com/office/drawing/2010/main">
                 <a:solidFill>
                   <a:srgbClr val="FFFFFF"/>
                 </a:solidFill>
               </a14:hiddenFill>
             </a:ext>
             <a:ext uri="{91240B29-F687-4f45-9708-019B960494DF}">
-              <a14:hiddenLine xmlns:a14="http://schemas.microsoft.com/office/drawing/2010/main" xmlns="" w="9525">
+              <a14:hiddenLine xmlns="" xmlns:a14="http://schemas.microsoft.com/office/drawing/2010/main" w="9525">
                 <a:solidFill>
                   <a:srgbClr val="000000"/>
                 </a:solidFill>
@@ -9900,14 +9907,14 @@
           <a:ln/>
           <a:extLst>
             <a:ext uri="{909E8E84-426E-40dd-AFC4-6F175D3DCCD1}">
-              <a14:hiddenFill xmlns="" xmlns:a14="http://schemas.microsoft.com/office/drawing/2010/main">
+              <a14:hiddenFill xmlns:a14="http://schemas.microsoft.com/office/drawing/2010/main" xmlns="">
                 <a:solidFill>
                   <a:srgbClr val="FFFFFF"/>
                 </a:solidFill>
               </a14:hiddenFill>
             </a:ext>
             <a:ext uri="{91240B29-F687-4f45-9708-019B960494DF}">
-              <a14:hiddenLine xmlns="" xmlns:a14="http://schemas.microsoft.com/office/drawing/2010/main" w="9525">
+              <a14:hiddenLine xmlns:a14="http://schemas.microsoft.com/office/drawing/2010/main" xmlns="" w="9525">
                 <a:solidFill>
                   <a:srgbClr val="000000"/>
                 </a:solidFill>
@@ -10825,14 +10832,14 @@
           <a:ln/>
           <a:extLst>
             <a:ext uri="{909E8E84-426E-40dd-AFC4-6F175D3DCCD1}">
-              <a14:hiddenFill xmlns="" xmlns:a14="http://schemas.microsoft.com/office/drawing/2010/main">
+              <a14:hiddenFill xmlns:a14="http://schemas.microsoft.com/office/drawing/2010/main" xmlns="">
                 <a:solidFill>
                   <a:srgbClr val="FFFFFF"/>
                 </a:solidFill>
               </a14:hiddenFill>
             </a:ext>
             <a:ext uri="{91240B29-F687-4f45-9708-019B960494DF}">
-              <a14:hiddenLine xmlns="" xmlns:a14="http://schemas.microsoft.com/office/drawing/2010/main" w="9525">
+              <a14:hiddenLine xmlns:a14="http://schemas.microsoft.com/office/drawing/2010/main" xmlns="" w="9525">
                 <a:solidFill>
                   <a:srgbClr val="000000"/>
                 </a:solidFill>
@@ -10985,14 +10992,14 @@
           </a:ln>
           <a:extLst>
             <a:ext uri="{909E8E84-426E-40dd-AFC4-6F175D3DCCD1}">
-              <a14:hiddenFill xmlns="" xmlns:a14="http://schemas.microsoft.com/office/drawing/2010/main">
+              <a14:hiddenFill xmlns:a14="http://schemas.microsoft.com/office/drawing/2010/main" xmlns="">
                 <a:solidFill>
                   <a:srgbClr val="FFFFFF"/>
                 </a:solidFill>
               </a14:hiddenFill>
             </a:ext>
             <a:ext uri="{91240B29-F687-4f45-9708-019B960494DF}">
-              <a14:hiddenLine xmlns="" xmlns:a14="http://schemas.microsoft.com/office/drawing/2010/main" w="12700" cap="sq">
+              <a14:hiddenLine xmlns:a14="http://schemas.microsoft.com/office/drawing/2010/main" xmlns="" w="12700" cap="sq">
                 <a:solidFill>
                   <a:srgbClr val="000000"/>
                 </a:solidFill>
@@ -11689,14 +11696,14 @@
         <p:spPr>
           <a:extLst>
             <a:ext uri="{909E8E84-426E-40dd-AFC4-6F175D3DCCD1}">
-              <a14:hiddenFill xmlns="" xmlns:a14="http://schemas.microsoft.com/office/drawing/2010/main">
+              <a14:hiddenFill xmlns:a14="http://schemas.microsoft.com/office/drawing/2010/main" xmlns="">
                 <a:solidFill>
                   <a:srgbClr val="FFFFFF"/>
                 </a:solidFill>
               </a14:hiddenFill>
             </a:ext>
             <a:ext uri="{91240B29-F687-4f45-9708-019B960494DF}">
-              <a14:hiddenLine xmlns="" xmlns:a14="http://schemas.microsoft.com/office/drawing/2010/main" w="9525">
+              <a14:hiddenLine xmlns:a14="http://schemas.microsoft.com/office/drawing/2010/main" xmlns="" w="9525">
                 <a:solidFill>
                   <a:srgbClr val="000000"/>
                 </a:solidFill>
@@ -11912,14 +11919,14 @@
           <a:noFill/>
           <a:extLst>
             <a:ext uri="{909E8E84-426E-40dd-AFC4-6F175D3DCCD1}">
-              <a14:hiddenFill xmlns:a14="http://schemas.microsoft.com/office/drawing/2010/main" xmlns="">
+              <a14:hiddenFill xmlns="" xmlns:a14="http://schemas.microsoft.com/office/drawing/2010/main">
                 <a:solidFill>
                   <a:srgbClr val="FFFFFF"/>
                 </a:solidFill>
               </a14:hiddenFill>
             </a:ext>
             <a:ext uri="{91240B29-F687-4f45-9708-019B960494DF}">
-              <a14:hiddenLine xmlns:a14="http://schemas.microsoft.com/office/drawing/2010/main" xmlns="" w="9525">
+              <a14:hiddenLine xmlns="" xmlns:a14="http://schemas.microsoft.com/office/drawing/2010/main" w="9525">
                 <a:solidFill>
                   <a:srgbClr val="000000"/>
                 </a:solidFill>
@@ -12590,14 +12597,14 @@
           <a:noFill/>
           <a:extLst>
             <a:ext uri="{909E8E84-426E-40dd-AFC4-6F175D3DCCD1}">
-              <a14:hiddenFill xmlns:a14="http://schemas.microsoft.com/office/drawing/2010/main" xmlns="">
+              <a14:hiddenFill xmlns="" xmlns:a14="http://schemas.microsoft.com/office/drawing/2010/main">
                 <a:solidFill>
                   <a:srgbClr val="FFFFFF"/>
                 </a:solidFill>
               </a14:hiddenFill>
             </a:ext>
             <a:ext uri="{91240B29-F687-4f45-9708-019B960494DF}">
-              <a14:hiddenLine xmlns:a14="http://schemas.microsoft.com/office/drawing/2010/main" xmlns="" w="9525">
+              <a14:hiddenLine xmlns="" xmlns:a14="http://schemas.microsoft.com/office/drawing/2010/main" w="9525">
                 <a:solidFill>
                   <a:srgbClr val="000000"/>
                 </a:solidFill>
@@ -12901,14 +12908,14 @@
           <a:effectLst/>
           <a:extLst>
             <a:ext uri="{909E8E84-426E-40dd-AFC4-6F175D3DCCD1}">
-              <a14:hiddenFill xmlns="" xmlns:a14="http://schemas.microsoft.com/office/drawing/2010/main">
+              <a14:hiddenFill xmlns:a14="http://schemas.microsoft.com/office/drawing/2010/main" xmlns="">
                 <a:solidFill>
                   <a:schemeClr val="accent1"/>
                 </a:solidFill>
               </a14:hiddenFill>
             </a:ext>
             <a:ext uri="{AF507438-7753-43e0-B8FC-AC1667EBCBE1}">
-              <a14:hiddenEffects xmlns="" xmlns:a14="http://schemas.microsoft.com/office/drawing/2010/main">
+              <a14:hiddenEffects xmlns:a14="http://schemas.microsoft.com/office/drawing/2010/main" xmlns="">
                 <a:effectLst>
                   <a:outerShdw blurRad="63500" dist="35921" dir="2700000" algn="ctr" rotWithShape="0">
                     <a:schemeClr val="bg2"/>
@@ -13423,14 +13430,14 @@
           <a:noFill/>
           <a:extLst>
             <a:ext uri="{909E8E84-426E-40dd-AFC4-6F175D3DCCD1}">
-              <a14:hiddenFill xmlns="" xmlns:a14="http://schemas.microsoft.com/office/drawing/2010/main">
+              <a14:hiddenFill xmlns:a14="http://schemas.microsoft.com/office/drawing/2010/main" xmlns="">
                 <a:solidFill>
                   <a:srgbClr val="FFFFFF"/>
                 </a:solidFill>
               </a14:hiddenFill>
             </a:ext>
             <a:ext uri="{91240B29-F687-4f45-9708-019B960494DF}">
-              <a14:hiddenLine xmlns="" xmlns:a14="http://schemas.microsoft.com/office/drawing/2010/main" w="9525">
+              <a14:hiddenLine xmlns:a14="http://schemas.microsoft.com/office/drawing/2010/main" xmlns="" w="9525">
                 <a:solidFill>
                   <a:srgbClr val="000000"/>
                 </a:solidFill>
@@ -13673,14 +13680,14 @@
           <a:effectLst/>
           <a:extLst>
             <a:ext uri="{909E8E84-426E-40dd-AFC4-6F175D3DCCD1}">
-              <a14:hiddenFill xmlns="" xmlns:a14="http://schemas.microsoft.com/office/drawing/2010/main">
+              <a14:hiddenFill xmlns:a14="http://schemas.microsoft.com/office/drawing/2010/main" xmlns="">
                 <a:solidFill>
                   <a:schemeClr val="accent1"/>
                 </a:solidFill>
               </a14:hiddenFill>
             </a:ext>
             <a:ext uri="{AF507438-7753-43e0-B8FC-AC1667EBCBE1}">
-              <a14:hiddenEffects xmlns="" xmlns:a14="http://schemas.microsoft.com/office/drawing/2010/main">
+              <a14:hiddenEffects xmlns:a14="http://schemas.microsoft.com/office/drawing/2010/main" xmlns="">
                 <a:effectLst>
                   <a:outerShdw blurRad="63500" dist="35921" dir="2700000" algn="ctr" rotWithShape="0">
                     <a:schemeClr val="bg2"/>
@@ -14160,14 +14167,14 @@
           <a:noFill/>
           <a:extLst>
             <a:ext uri="{909E8E84-426E-40dd-AFC4-6F175D3DCCD1}">
-              <a14:hiddenFill xmlns="" xmlns:a14="http://schemas.microsoft.com/office/drawing/2010/main">
+              <a14:hiddenFill xmlns:a14="http://schemas.microsoft.com/office/drawing/2010/main" xmlns="">
                 <a:solidFill>
                   <a:srgbClr val="FFFFFF"/>
                 </a:solidFill>
               </a14:hiddenFill>
             </a:ext>
             <a:ext uri="{91240B29-F687-4f45-9708-019B960494DF}">
-              <a14:hiddenLine xmlns="" xmlns:a14="http://schemas.microsoft.com/office/drawing/2010/main" w="9525">
+              <a14:hiddenLine xmlns:a14="http://schemas.microsoft.com/office/drawing/2010/main" xmlns="" w="9525">
                 <a:solidFill>
                   <a:srgbClr val="000000"/>
                 </a:solidFill>
@@ -14366,7 +14373,7 @@
           </a:ln>
           <a:extLst>
             <a:ext uri="{91240B29-F687-4f45-9708-019B960494DF}">
-              <a14:hiddenLine xmlns:a14="http://schemas.microsoft.com/office/drawing/2010/main" xmlns="" w="12700" cap="sq">
+              <a14:hiddenLine xmlns="" xmlns:a14="http://schemas.microsoft.com/office/drawing/2010/main" w="12700" cap="sq">
                 <a:solidFill>
                   <a:srgbClr val="000000"/>
                 </a:solidFill>
@@ -14562,14 +14569,14 @@
           <a:effectLst/>
           <a:extLst>
             <a:ext uri="{909E8E84-426E-40dd-AFC4-6F175D3DCCD1}">
-              <a14:hiddenFill xmlns="" xmlns:a14="http://schemas.microsoft.com/office/drawing/2010/main">
+              <a14:hiddenFill xmlns:a14="http://schemas.microsoft.com/office/drawing/2010/main" xmlns="">
                 <a:solidFill>
                   <a:schemeClr val="accent1"/>
                 </a:solidFill>
               </a14:hiddenFill>
             </a:ext>
             <a:ext uri="{AF507438-7753-43e0-B8FC-AC1667EBCBE1}">
-              <a14:hiddenEffects xmlns="" xmlns:a14="http://schemas.microsoft.com/office/drawing/2010/main">
+              <a14:hiddenEffects xmlns:a14="http://schemas.microsoft.com/office/drawing/2010/main" xmlns="">
                 <a:effectLst>
                   <a:outerShdw blurRad="63500" dist="35921" dir="2700000" algn="ctr" rotWithShape="0">
                     <a:schemeClr val="bg2"/>
@@ -14691,14 +14698,14 @@
           <a:effectLst/>
           <a:extLst>
             <a:ext uri="{909E8E84-426E-40dd-AFC4-6F175D3DCCD1}">
-              <a14:hiddenFill xmlns="" xmlns:a14="http://schemas.microsoft.com/office/drawing/2010/main">
+              <a14:hiddenFill xmlns:a14="http://schemas.microsoft.com/office/drawing/2010/main" xmlns="">
                 <a:solidFill>
                   <a:schemeClr val="accent1"/>
                 </a:solidFill>
               </a14:hiddenFill>
             </a:ext>
             <a:ext uri="{AF507438-7753-43e0-B8FC-AC1667EBCBE1}">
-              <a14:hiddenEffects xmlns="" xmlns:a14="http://schemas.microsoft.com/office/drawing/2010/main">
+              <a14:hiddenEffects xmlns:a14="http://schemas.microsoft.com/office/drawing/2010/main" xmlns="">
                 <a:effectLst>
                   <a:outerShdw blurRad="63500" dist="35921" dir="2700000" algn="ctr" rotWithShape="0">
                     <a:schemeClr val="bg2"/>
@@ -15089,14 +15096,14 @@
           <a:noFill/>
           <a:extLst>
             <a:ext uri="{909E8E84-426E-40dd-AFC4-6F175D3DCCD1}">
-              <a14:hiddenFill xmlns:a14="http://schemas.microsoft.com/office/drawing/2010/main" xmlns="">
+              <a14:hiddenFill xmlns="" xmlns:a14="http://schemas.microsoft.com/office/drawing/2010/main">
                 <a:solidFill>
                   <a:srgbClr val="FFFFFF"/>
                 </a:solidFill>
               </a14:hiddenFill>
             </a:ext>
             <a:ext uri="{91240B29-F687-4f45-9708-019B960494DF}">
-              <a14:hiddenLine xmlns:a14="http://schemas.microsoft.com/office/drawing/2010/main" xmlns="" w="9525">
+              <a14:hiddenLine xmlns="" xmlns:a14="http://schemas.microsoft.com/office/drawing/2010/main" w="9525">
                 <a:solidFill>
                   <a:srgbClr val="000000"/>
                 </a:solidFill>
@@ -15295,7 +15302,7 @@
           </a:ln>
           <a:extLst>
             <a:ext uri="{91240B29-F687-4f45-9708-019B960494DF}">
-              <a14:hiddenLine xmlns="" xmlns:a14="http://schemas.microsoft.com/office/drawing/2010/main" w="12700" cap="sq">
+              <a14:hiddenLine xmlns:a14="http://schemas.microsoft.com/office/drawing/2010/main" xmlns="" w="12700" cap="sq">
                 <a:solidFill>
                   <a:srgbClr val="000000"/>
                 </a:solidFill>
@@ -15499,14 +15506,14 @@
           <a:effectLst/>
           <a:extLst>
             <a:ext uri="{909E8E84-426E-40dd-AFC4-6F175D3DCCD1}">
-              <a14:hiddenFill xmlns:a14="http://schemas.microsoft.com/office/drawing/2010/main" xmlns="">
+              <a14:hiddenFill xmlns="" xmlns:a14="http://schemas.microsoft.com/office/drawing/2010/main">
                 <a:solidFill>
                   <a:schemeClr val="accent1"/>
                 </a:solidFill>
               </a14:hiddenFill>
             </a:ext>
             <a:ext uri="{AF507438-7753-43e0-B8FC-AC1667EBCBE1}">
-              <a14:hiddenEffects xmlns:a14="http://schemas.microsoft.com/office/drawing/2010/main" xmlns="">
+              <a14:hiddenEffects xmlns="" xmlns:a14="http://schemas.microsoft.com/office/drawing/2010/main">
                 <a:effectLst>
                   <a:outerShdw blurRad="63500" dist="35921" dir="2700000" algn="ctr" rotWithShape="0">
                     <a:schemeClr val="bg2"/>
@@ -15533,8 +15540,8 @@
         </p:nvSpPr>
         <p:spPr bwMode="auto">
           <a:xfrm>
-            <a:off x="1734505" y="3141783"/>
-            <a:ext cx="7807265" cy="461665"/>
+            <a:off x="1734505" y="2957117"/>
+            <a:ext cx="7903446" cy="830997"/>
           </a:xfrm>
           <a:prstGeom prst="rect">
             <a:avLst/>
@@ -15547,7 +15554,7 @@
           </a:ln>
           <a:extLst>
             <a:ext uri="{91240B29-F687-4f45-9708-019B960494DF}">
-              <a14:hiddenLine xmlns="" xmlns:a14="http://schemas.microsoft.com/office/drawing/2010/main" w="12700" cap="sq">
+              <a14:hiddenLine xmlns:a14="http://schemas.microsoft.com/office/drawing/2010/main" xmlns="" w="12700" cap="sq">
                 <a:solidFill>
                   <a:srgbClr val="000000"/>
                 </a:solidFill>
@@ -15681,7 +15688,17 @@
                   <a:srgbClr val="FFFF00"/>
                 </a:solidFill>
               </a:rPr>
-              <a:t>– copies executable into common location</a:t>
+              <a:t>– copies executable into common location </a:t>
+            </a:r>
+          </a:p>
+          <a:p>
+            <a:r>
+              <a:rPr lang="en-IE" sz="2400" dirty="0">
+                <a:solidFill>
+                  <a:srgbClr val="FFFF00"/>
+                </a:solidFill>
+              </a:rPr>
+              <a:t>                       (also includes stack build) </a:t>
             </a:r>
           </a:p>
         </p:txBody>
@@ -15716,7 +15733,7 @@
           </a:ln>
           <a:extLst>
             <a:ext uri="{91240B29-F687-4f45-9708-019B960494DF}">
-              <a14:hiddenLine xmlns="" xmlns:a14="http://schemas.microsoft.com/office/drawing/2010/main" w="12700" cap="sq">
+              <a14:hiddenLine xmlns:a14="http://schemas.microsoft.com/office/drawing/2010/main" xmlns="" w="12700" cap="sq">
                 <a:solidFill>
                   <a:srgbClr val="000000"/>
                 </a:solidFill>
@@ -16540,14 +16557,14 @@
           <a:noFill/>
           <a:extLst>
             <a:ext uri="{909E8E84-426E-40dd-AFC4-6F175D3DCCD1}">
-              <a14:hiddenFill xmlns="" xmlns:a14="http://schemas.microsoft.com/office/drawing/2010/main">
+              <a14:hiddenFill xmlns:a14="http://schemas.microsoft.com/office/drawing/2010/main" xmlns="">
                 <a:solidFill>
                   <a:srgbClr val="FFFFFF"/>
                 </a:solidFill>
               </a14:hiddenFill>
             </a:ext>
             <a:ext uri="{91240B29-F687-4f45-9708-019B960494DF}">
-              <a14:hiddenLine xmlns="" xmlns:a14="http://schemas.microsoft.com/office/drawing/2010/main" w="9525">
+              <a14:hiddenLine xmlns:a14="http://schemas.microsoft.com/office/drawing/2010/main" xmlns="" w="9525">
                 <a:solidFill>
                   <a:srgbClr val="000000"/>
                 </a:solidFill>
@@ -16718,10 +16735,10 @@
       </p:sp>
       <p:sp>
         <p:nvSpPr>
-          <p:cNvPr id="9" name="Text Box 4">
+          <p:cNvPr id="12" name="Text Box 4">
             <a:extLst>
               <a:ext uri="{FF2B5EF4-FFF2-40B4-BE49-F238E27FC236}">
-                <a16:creationId xmlns:a16="http://schemas.microsoft.com/office/drawing/2014/main" id="{68A86FAD-82B1-3F49-AE35-ABAAEFB8272F}"/>
+                <a16:creationId xmlns:a16="http://schemas.microsoft.com/office/drawing/2014/main" id="{921B8B86-6C8B-C646-A2C3-F54818875159}"/>
               </a:ext>
             </a:extLst>
           </p:cNvPr>
@@ -16732,8 +16749,8 @@
         </p:nvSpPr>
         <p:spPr bwMode="auto">
           <a:xfrm>
-            <a:off x="1206128" y="3451602"/>
-            <a:ext cx="6870663" cy="461665"/>
+            <a:off x="706142" y="3697969"/>
+            <a:ext cx="7796173" cy="830997"/>
           </a:xfrm>
           <a:prstGeom prst="rect">
             <a:avLst/>
@@ -16746,7 +16763,7 @@
           </a:ln>
           <a:extLst>
             <a:ext uri="{91240B29-F687-4f45-9708-019B960494DF}">
-              <a14:hiddenLine xmlns:a14="http://schemas.microsoft.com/office/drawing/2010/main" xmlns="" w="12700" cap="sq">
+              <a14:hiddenLine xmlns="" xmlns:a14="http://schemas.microsoft.com/office/drawing/2010/main" w="12700" cap="sq">
                 <a:solidFill>
                   <a:srgbClr val="000000"/>
                 </a:solidFill>
@@ -16872,175 +16889,6 @@
           <a:p>
             <a:r>
               <a:rPr lang="en-IE" sz="2400" dirty="0"/>
-              <a:t>$ stack build </a:t>
-            </a:r>
-            <a:r>
-              <a:rPr lang="en-IE" sz="2400" dirty="0">
-                <a:solidFill>
-                  <a:srgbClr val="FFFF00"/>
-                </a:solidFill>
-              </a:rPr>
-              <a:t>–rebuilds project with updated code</a:t>
-            </a:r>
-          </a:p>
-        </p:txBody>
-      </p:sp>
-      <p:sp>
-        <p:nvSpPr>
-          <p:cNvPr id="12" name="Text Box 4">
-            <a:extLst>
-              <a:ext uri="{FF2B5EF4-FFF2-40B4-BE49-F238E27FC236}">
-                <a16:creationId xmlns:a16="http://schemas.microsoft.com/office/drawing/2014/main" id="{921B8B86-6C8B-C646-A2C3-F54818875159}"/>
-              </a:ext>
-            </a:extLst>
-          </p:cNvPr>
-          <p:cNvSpPr txBox="1">
-            <a:spLocks noChangeArrowheads="1"/>
-          </p:cNvSpPr>
-          <p:nvPr/>
-        </p:nvSpPr>
-        <p:spPr bwMode="auto">
-          <a:xfrm>
-            <a:off x="1206128" y="4312919"/>
-            <a:ext cx="9011121" cy="461665"/>
-          </a:xfrm>
-          <a:prstGeom prst="rect">
-            <a:avLst/>
-          </a:prstGeom>
-          <a:solidFill>
-            <a:schemeClr val="accent1"/>
-          </a:solidFill>
-          <a:ln>
-            <a:noFill/>
-          </a:ln>
-          <a:extLst>
-            <a:ext uri="{91240B29-F687-4f45-9708-019B960494DF}">
-              <a14:hiddenLine xmlns:a14="http://schemas.microsoft.com/office/drawing/2010/main" xmlns="" w="12700" cap="sq">
-                <a:solidFill>
-                  <a:srgbClr val="000000"/>
-                </a:solidFill>
-                <a:miter lim="800000"/>
-                <a:headEnd/>
-                <a:tailEnd/>
-              </a14:hiddenLine>
-            </a:ext>
-          </a:extLst>
-        </p:spPr>
-        <p:txBody>
-          <a:bodyPr wrap="none" anchor="ctr">
-            <a:spAutoFit/>
-          </a:bodyPr>
-          <a:lstStyle>
-            <a:lvl1pPr>
-              <a:defRPr sz="2800">
-                <a:solidFill>
-                  <a:schemeClr val="tx1"/>
-                </a:solidFill>
-                <a:latin typeface="Tahoma" charset="0"/>
-                <a:ea typeface="ＭＳ Ｐゴシック" charset="0"/>
-                <a:cs typeface="ＭＳ Ｐゴシック" charset="0"/>
-              </a:defRPr>
-            </a:lvl1pPr>
-            <a:lvl2pPr marL="742950" indent="-285750">
-              <a:defRPr sz="2800">
-                <a:solidFill>
-                  <a:schemeClr val="tx1"/>
-                </a:solidFill>
-                <a:latin typeface="Tahoma" charset="0"/>
-                <a:ea typeface="ＭＳ Ｐゴシック" charset="0"/>
-              </a:defRPr>
-            </a:lvl2pPr>
-            <a:lvl3pPr marL="1143000" indent="-228600">
-              <a:defRPr sz="2800">
-                <a:solidFill>
-                  <a:schemeClr val="tx1"/>
-                </a:solidFill>
-                <a:latin typeface="Tahoma" charset="0"/>
-                <a:ea typeface="ＭＳ Ｐゴシック" charset="0"/>
-              </a:defRPr>
-            </a:lvl3pPr>
-            <a:lvl4pPr marL="1600200" indent="-228600">
-              <a:defRPr sz="2800">
-                <a:solidFill>
-                  <a:schemeClr val="tx1"/>
-                </a:solidFill>
-                <a:latin typeface="Tahoma" charset="0"/>
-                <a:ea typeface="ＭＳ Ｐゴシック" charset="0"/>
-              </a:defRPr>
-            </a:lvl4pPr>
-            <a:lvl5pPr marL="2057400" indent="-228600">
-              <a:defRPr sz="2800">
-                <a:solidFill>
-                  <a:schemeClr val="tx1"/>
-                </a:solidFill>
-                <a:latin typeface="Tahoma" charset="0"/>
-                <a:ea typeface="ＭＳ Ｐゴシック" charset="0"/>
-              </a:defRPr>
-            </a:lvl5pPr>
-            <a:lvl6pPr marL="2514600" indent="-228600" eaLnBrk="0" fontAlgn="base" hangingPunct="0">
-              <a:spcBef>
-                <a:spcPct val="0"/>
-              </a:spcBef>
-              <a:spcAft>
-                <a:spcPct val="0"/>
-              </a:spcAft>
-              <a:defRPr sz="2800">
-                <a:solidFill>
-                  <a:schemeClr val="tx1"/>
-                </a:solidFill>
-                <a:latin typeface="Tahoma" charset="0"/>
-                <a:ea typeface="ＭＳ Ｐゴシック" charset="0"/>
-              </a:defRPr>
-            </a:lvl6pPr>
-            <a:lvl7pPr marL="2971800" indent="-228600" eaLnBrk="0" fontAlgn="base" hangingPunct="0">
-              <a:spcBef>
-                <a:spcPct val="0"/>
-              </a:spcBef>
-              <a:spcAft>
-                <a:spcPct val="0"/>
-              </a:spcAft>
-              <a:defRPr sz="2800">
-                <a:solidFill>
-                  <a:schemeClr val="tx1"/>
-                </a:solidFill>
-                <a:latin typeface="Tahoma" charset="0"/>
-                <a:ea typeface="ＭＳ Ｐゴシック" charset="0"/>
-              </a:defRPr>
-            </a:lvl7pPr>
-            <a:lvl8pPr marL="3429000" indent="-228600" eaLnBrk="0" fontAlgn="base" hangingPunct="0">
-              <a:spcBef>
-                <a:spcPct val="0"/>
-              </a:spcBef>
-              <a:spcAft>
-                <a:spcPct val="0"/>
-              </a:spcAft>
-              <a:defRPr sz="2800">
-                <a:solidFill>
-                  <a:schemeClr val="tx1"/>
-                </a:solidFill>
-                <a:latin typeface="Tahoma" charset="0"/>
-                <a:ea typeface="ＭＳ Ｐゴシック" charset="0"/>
-              </a:defRPr>
-            </a:lvl8pPr>
-            <a:lvl9pPr marL="3886200" indent="-228600" eaLnBrk="0" fontAlgn="base" hangingPunct="0">
-              <a:spcBef>
-                <a:spcPct val="0"/>
-              </a:spcBef>
-              <a:spcAft>
-                <a:spcPct val="0"/>
-              </a:spcAft>
-              <a:defRPr sz="2800">
-                <a:solidFill>
-                  <a:schemeClr val="tx1"/>
-                </a:solidFill>
-                <a:latin typeface="Tahoma" charset="0"/>
-                <a:ea typeface="ＭＳ Ｐゴシック" charset="0"/>
-              </a:defRPr>
-            </a:lvl9pPr>
-          </a:lstStyle>
-          <a:p>
-            <a:r>
-              <a:rPr lang="en-IE" sz="2400" dirty="0"/>
               <a:t>$ stack install </a:t>
             </a:r>
             <a:r>
@@ -17049,8 +16897,31 @@
                   <a:srgbClr val="FFFF00"/>
                 </a:solidFill>
               </a:rPr>
-              <a:t>– copies updated executable into common location</a:t>
+              <a:t>– rebuilds project with updated code and </a:t>
             </a:r>
+          </a:p>
+          <a:p>
+            <a:r>
+              <a:rPr lang="en-IE" sz="2400" dirty="0">
+                <a:solidFill>
+                  <a:srgbClr val="FFFF00"/>
+                </a:solidFill>
+              </a:rPr>
+              <a:t>copies updated executable into </a:t>
+            </a:r>
+            <a:r>
+              <a:rPr lang="en-IE" sz="2400">
+                <a:solidFill>
+                  <a:srgbClr val="FFFF00"/>
+                </a:solidFill>
+              </a:rPr>
+              <a:t>common location. </a:t>
+            </a:r>
+            <a:endParaRPr lang="en-IE" sz="2400" dirty="0">
+              <a:solidFill>
+                <a:srgbClr val="FFFF00"/>
+              </a:solidFill>
+            </a:endParaRPr>
           </a:p>
         </p:txBody>
       </p:sp>
@@ -17084,7 +16955,7 @@
           </a:ln>
           <a:extLst>
             <a:ext uri="{91240B29-F687-4f45-9708-019B960494DF}">
-              <a14:hiddenLine xmlns:a14="http://schemas.microsoft.com/office/drawing/2010/main" xmlns="" w="12700" cap="sq">
+              <a14:hiddenLine xmlns="" xmlns:a14="http://schemas.microsoft.com/office/drawing/2010/main" w="12700" cap="sq">
                 <a:solidFill>
                   <a:srgbClr val="000000"/>
                 </a:solidFill>
@@ -17324,14 +17195,14 @@
           <a:effectLst/>
           <a:extLst>
             <a:ext uri="{909E8E84-426E-40dd-AFC4-6F175D3DCCD1}">
-              <a14:hiddenFill xmlns="" xmlns:a14="http://schemas.microsoft.com/office/drawing/2010/main">
+              <a14:hiddenFill xmlns:a14="http://schemas.microsoft.com/office/drawing/2010/main" xmlns="">
                 <a:solidFill>
                   <a:schemeClr val="accent1"/>
                 </a:solidFill>
               </a14:hiddenFill>
             </a:ext>
             <a:ext uri="{AF507438-7753-43e0-B8FC-AC1667EBCBE1}">
-              <a14:hiddenEffects xmlns="" xmlns:a14="http://schemas.microsoft.com/office/drawing/2010/main">
+              <a14:hiddenEffects xmlns:a14="http://schemas.microsoft.com/office/drawing/2010/main" xmlns="">
                 <a:effectLst>
                   <a:outerShdw blurRad="63500" dist="35921" dir="2700000" algn="ctr" rotWithShape="0">
                     <a:schemeClr val="bg2"/>
@@ -17407,14 +17278,14 @@
           <a:effectLst/>
           <a:extLst>
             <a:ext uri="{909E8E84-426E-40dd-AFC4-6F175D3DCCD1}">
-              <a14:hiddenFill xmlns="" xmlns:a14="http://schemas.microsoft.com/office/drawing/2010/main">
+              <a14:hiddenFill xmlns:a14="http://schemas.microsoft.com/office/drawing/2010/main" xmlns="">
                 <a:solidFill>
                   <a:schemeClr val="accent1"/>
                 </a:solidFill>
               </a14:hiddenFill>
             </a:ext>
             <a:ext uri="{AF507438-7753-43e0-B8FC-AC1667EBCBE1}">
-              <a14:hiddenEffects xmlns="" xmlns:a14="http://schemas.microsoft.com/office/drawing/2010/main">
+              <a14:hiddenEffects xmlns:a14="http://schemas.microsoft.com/office/drawing/2010/main" xmlns="">
                 <a:effectLst>
                   <a:outerShdw blurRad="63500" dist="35921" dir="2700000" algn="ctr" rotWithShape="0">
                     <a:schemeClr val="bg2"/>
@@ -17463,14 +17334,14 @@
           <a:effectLst/>
           <a:extLst>
             <a:ext uri="{909E8E84-426E-40dd-AFC4-6F175D3DCCD1}">
-              <a14:hiddenFill xmlns="" xmlns:a14="http://schemas.microsoft.com/office/drawing/2010/main">
+              <a14:hiddenFill xmlns:a14="http://schemas.microsoft.com/office/drawing/2010/main" xmlns="">
                 <a:solidFill>
                   <a:schemeClr val="accent1"/>
                 </a:solidFill>
               </a14:hiddenFill>
             </a:ext>
             <a:ext uri="{AF507438-7753-43e0-B8FC-AC1667EBCBE1}">
-              <a14:hiddenEffects xmlns="" xmlns:a14="http://schemas.microsoft.com/office/drawing/2010/main">
+              <a14:hiddenEffects xmlns:a14="http://schemas.microsoft.com/office/drawing/2010/main" xmlns="">
                 <a:effectLst>
                   <a:outerShdw blurRad="63500" dist="35921" dir="2700000" algn="ctr" rotWithShape="0">
                     <a:schemeClr val="bg2"/>
@@ -17722,7 +17593,7 @@
                                           </p:stCondLst>
                                         </p:cTn>
                                         <p:tgtEl>
-                                          <p:spTgt spid="9"/>
+                                          <p:spTgt spid="12"/>
                                         </p:tgtEl>
                                         <p:attrNameLst>
                                           <p:attrName>style.visibility</p:attrName>
@@ -17736,7 +17607,7 @@
                                       <p:cBhvr additive="base">
                                         <p:cTn id="19" dur="500" fill="hold"/>
                                         <p:tgtEl>
-                                          <p:spTgt spid="9"/>
+                                          <p:spTgt spid="12"/>
                                         </p:tgtEl>
                                         <p:attrNameLst>
                                           <p:attrName>ppt_x</p:attrName>
@@ -17759,7 +17630,7 @@
                                       <p:cBhvr additive="base">
                                         <p:cTn id="20" dur="500" fill="hold"/>
                                         <p:tgtEl>
-                                          <p:spTgt spid="9"/>
+                                          <p:spTgt spid="12"/>
                                         </p:tgtEl>
                                         <p:attrNameLst>
                                           <p:attrName>ppt_y</p:attrName>
@@ -17813,7 +17684,7 @@
                                           </p:stCondLst>
                                         </p:cTn>
                                         <p:tgtEl>
-                                          <p:spTgt spid="12"/>
+                                          <p:spTgt spid="4"/>
                                         </p:tgtEl>
                                         <p:attrNameLst>
                                           <p:attrName>style.visibility</p:attrName>
@@ -17827,7 +17698,7 @@
                                       <p:cBhvr additive="base">
                                         <p:cTn id="25" dur="500" fill="hold"/>
                                         <p:tgtEl>
-                                          <p:spTgt spid="12"/>
+                                          <p:spTgt spid="4"/>
                                         </p:tgtEl>
                                         <p:attrNameLst>
                                           <p:attrName>ppt_x</p:attrName>
@@ -17850,7 +17721,7 @@
                                       <p:cBhvr additive="base">
                                         <p:cTn id="26" dur="500" fill="hold"/>
                                         <p:tgtEl>
-                                          <p:spTgt spid="12"/>
+                                          <p:spTgt spid="4"/>
                                         </p:tgtEl>
                                         <p:attrNameLst>
                                           <p:attrName>ppt_y</p:attrName>
@@ -17904,7 +17775,7 @@
                                           </p:stCondLst>
                                         </p:cTn>
                                         <p:tgtEl>
-                                          <p:spTgt spid="4"/>
+                                          <p:spTgt spid="13"/>
                                         </p:tgtEl>
                                         <p:attrNameLst>
                                           <p:attrName>style.visibility</p:attrName>
@@ -17918,7 +17789,7 @@
                                       <p:cBhvr additive="base">
                                         <p:cTn id="31" dur="500" fill="hold"/>
                                         <p:tgtEl>
-                                          <p:spTgt spid="4"/>
+                                          <p:spTgt spid="13"/>
                                         </p:tgtEl>
                                         <p:attrNameLst>
                                           <p:attrName>ppt_x</p:attrName>
@@ -17941,7 +17812,7 @@
                                       <p:cBhvr additive="base">
                                         <p:cTn id="32" dur="500" fill="hold"/>
                                         <p:tgtEl>
-                                          <p:spTgt spid="4"/>
+                                          <p:spTgt spid="13"/>
                                         </p:tgtEl>
                                         <p:attrNameLst>
                                           <p:attrName>ppt_y</p:attrName>
@@ -17982,7 +17853,7 @@
                             </p:stCondLst>
                             <p:childTnLst>
                               <p:par>
-                                <p:cTn id="35" presetID="2" presetClass="entr" presetSubtype="4" fill="hold" grpId="0" nodeType="clickEffect">
+                                <p:cTn id="35" presetID="2" presetClass="entr" presetSubtype="4" fill="hold" nodeType="clickEffect">
                                   <p:stCondLst>
                                     <p:cond delay="0"/>
                                   </p:stCondLst>
@@ -17995,7 +17866,7 @@
                                           </p:stCondLst>
                                         </p:cTn>
                                         <p:tgtEl>
-                                          <p:spTgt spid="13"/>
+                                          <p:spTgt spid="19"/>
                                         </p:tgtEl>
                                         <p:attrNameLst>
                                           <p:attrName>style.visibility</p:attrName>
@@ -18009,7 +17880,7 @@
                                       <p:cBhvr additive="base">
                                         <p:cTn id="37" dur="500" fill="hold"/>
                                         <p:tgtEl>
-                                          <p:spTgt spid="13"/>
+                                          <p:spTgt spid="19"/>
                                         </p:tgtEl>
                                         <p:attrNameLst>
                                           <p:attrName>ppt_x</p:attrName>
@@ -18032,7 +17903,7 @@
                                       <p:cBhvr additive="base">
                                         <p:cTn id="38" dur="500" fill="hold"/>
                                         <p:tgtEl>
-                                          <p:spTgt spid="13"/>
+                                          <p:spTgt spid="19"/>
                                         </p:tgtEl>
                                         <p:attrNameLst>
                                           <p:attrName>ppt_y</p:attrName>
@@ -18086,7 +17957,7 @@
                                           </p:stCondLst>
                                         </p:cTn>
                                         <p:tgtEl>
-                                          <p:spTgt spid="19"/>
+                                          <p:spTgt spid="11"/>
                                         </p:tgtEl>
                                         <p:attrNameLst>
                                           <p:attrName>style.visibility</p:attrName>
@@ -18099,97 +17970,6 @@
                                     <p:anim calcmode="lin" valueType="num">
                                       <p:cBhvr additive="base">
                                         <p:cTn id="43" dur="500" fill="hold"/>
-                                        <p:tgtEl>
-                                          <p:spTgt spid="19"/>
-                                        </p:tgtEl>
-                                        <p:attrNameLst>
-                                          <p:attrName>ppt_x</p:attrName>
-                                        </p:attrNameLst>
-                                      </p:cBhvr>
-                                      <p:tavLst>
-                                        <p:tav tm="0">
-                                          <p:val>
-                                            <p:strVal val="#ppt_x"/>
-                                          </p:val>
-                                        </p:tav>
-                                        <p:tav tm="100000">
-                                          <p:val>
-                                            <p:strVal val="#ppt_x"/>
-                                          </p:val>
-                                        </p:tav>
-                                      </p:tavLst>
-                                    </p:anim>
-                                    <p:anim calcmode="lin" valueType="num">
-                                      <p:cBhvr additive="base">
-                                        <p:cTn id="44" dur="500" fill="hold"/>
-                                        <p:tgtEl>
-                                          <p:spTgt spid="19"/>
-                                        </p:tgtEl>
-                                        <p:attrNameLst>
-                                          <p:attrName>ppt_y</p:attrName>
-                                        </p:attrNameLst>
-                                      </p:cBhvr>
-                                      <p:tavLst>
-                                        <p:tav tm="0">
-                                          <p:val>
-                                            <p:strVal val="1+#ppt_h/2"/>
-                                          </p:val>
-                                        </p:tav>
-                                        <p:tav tm="100000">
-                                          <p:val>
-                                            <p:strVal val="#ppt_y"/>
-                                          </p:val>
-                                        </p:tav>
-                                      </p:tavLst>
-                                    </p:anim>
-                                  </p:childTnLst>
-                                </p:cTn>
-                              </p:par>
-                            </p:childTnLst>
-                          </p:cTn>
-                        </p:par>
-                      </p:childTnLst>
-                    </p:cTn>
-                  </p:par>
-                  <p:par>
-                    <p:cTn id="45" fill="hold">
-                      <p:stCondLst>
-                        <p:cond delay="indefinite"/>
-                      </p:stCondLst>
-                      <p:childTnLst>
-                        <p:par>
-                          <p:cTn id="46" fill="hold">
-                            <p:stCondLst>
-                              <p:cond delay="0"/>
-                            </p:stCondLst>
-                            <p:childTnLst>
-                              <p:par>
-                                <p:cTn id="47" presetID="2" presetClass="entr" presetSubtype="4" fill="hold" nodeType="clickEffect">
-                                  <p:stCondLst>
-                                    <p:cond delay="0"/>
-                                  </p:stCondLst>
-                                  <p:childTnLst>
-                                    <p:set>
-                                      <p:cBhvr>
-                                        <p:cTn id="48" dur="1" fill="hold">
-                                          <p:stCondLst>
-                                            <p:cond delay="0"/>
-                                          </p:stCondLst>
-                                        </p:cTn>
-                                        <p:tgtEl>
-                                          <p:spTgt spid="11"/>
-                                        </p:tgtEl>
-                                        <p:attrNameLst>
-                                          <p:attrName>style.visibility</p:attrName>
-                                        </p:attrNameLst>
-                                      </p:cBhvr>
-                                      <p:to>
-                                        <p:strVal val="visible"/>
-                                      </p:to>
-                                    </p:set>
-                                    <p:anim calcmode="lin" valueType="num">
-                                      <p:cBhvr additive="base">
-                                        <p:cTn id="49" dur="500" fill="hold"/>
                                         <p:tgtEl>
                                           <p:spTgt spid="11"/>
                                         </p:tgtEl>
@@ -18212,7 +17992,7 @@
                                     </p:anim>
                                     <p:anim calcmode="lin" valueType="num">
                                       <p:cBhvr additive="base">
-                                        <p:cTn id="50" dur="500" fill="hold"/>
+                                        <p:cTn id="44" dur="500" fill="hold"/>
                                         <p:tgtEl>
                                           <p:spTgt spid="11"/>
                                         </p:tgtEl>
@@ -18264,7 +18044,6 @@
       </p:par>
     </p:tnLst>
     <p:bldLst>
-      <p:bldP spid="9" grpId="0" animBg="1"/>
       <p:bldP spid="12" grpId="0" animBg="1"/>
       <p:bldP spid="13" grpId="0" animBg="1"/>
       <p:bldP spid="4" grpId="0" animBg="1"/>
@@ -18364,14 +18143,14 @@
           <a:noFill/>
           <a:extLst>
             <a:ext uri="{909E8E84-426E-40dd-AFC4-6F175D3DCCD1}">
-              <a14:hiddenFill xmlns:a14="http://schemas.microsoft.com/office/drawing/2010/main" xmlns="">
+              <a14:hiddenFill xmlns="" xmlns:a14="http://schemas.microsoft.com/office/drawing/2010/main">
                 <a:solidFill>
                   <a:srgbClr val="FFFFFF"/>
                 </a:solidFill>
               </a14:hiddenFill>
             </a:ext>
             <a:ext uri="{91240B29-F687-4f45-9708-019B960494DF}">
-              <a14:hiddenLine xmlns:a14="http://schemas.microsoft.com/office/drawing/2010/main" xmlns="" w="9525">
+              <a14:hiddenLine xmlns="" xmlns:a14="http://schemas.microsoft.com/office/drawing/2010/main" w="9525">
                 <a:solidFill>
                   <a:srgbClr val="000000"/>
                 </a:solidFill>
@@ -18579,14 +18358,14 @@
           <a:effectLst/>
           <a:extLst>
             <a:ext uri="{909E8E84-426E-40dd-AFC4-6F175D3DCCD1}">
-              <a14:hiddenFill xmlns="" xmlns:a14="http://schemas.microsoft.com/office/drawing/2010/main">
+              <a14:hiddenFill xmlns:a14="http://schemas.microsoft.com/office/drawing/2010/main" xmlns="">
                 <a:solidFill>
                   <a:schemeClr val="accent1"/>
                 </a:solidFill>
               </a14:hiddenFill>
             </a:ext>
             <a:ext uri="{AF507438-7753-43e0-B8FC-AC1667EBCBE1}">
-              <a14:hiddenEffects xmlns="" xmlns:a14="http://schemas.microsoft.com/office/drawing/2010/main">
+              <a14:hiddenEffects xmlns:a14="http://schemas.microsoft.com/office/drawing/2010/main" xmlns="">
                 <a:effectLst>
                   <a:outerShdw blurRad="63500" dist="35921" dir="2700000" algn="ctr" rotWithShape="0">
                     <a:schemeClr val="bg2"/>
@@ -18659,14 +18438,14 @@
           <a:effectLst/>
           <a:extLst>
             <a:ext uri="{909E8E84-426E-40dd-AFC4-6F175D3DCCD1}">
-              <a14:hiddenFill xmlns="" xmlns:a14="http://schemas.microsoft.com/office/drawing/2010/main">
+              <a14:hiddenFill xmlns:a14="http://schemas.microsoft.com/office/drawing/2010/main" xmlns="">
                 <a:solidFill>
                   <a:schemeClr val="accent1"/>
                 </a:solidFill>
               </a14:hiddenFill>
             </a:ext>
             <a:ext uri="{AF507438-7753-43e0-B8FC-AC1667EBCBE1}">
-              <a14:hiddenEffects xmlns="" xmlns:a14="http://schemas.microsoft.com/office/drawing/2010/main">
+              <a14:hiddenEffects xmlns:a14="http://schemas.microsoft.com/office/drawing/2010/main" xmlns="">
                 <a:effectLst>
                   <a:outerShdw blurRad="63500" dist="35921" dir="2700000" algn="ctr" rotWithShape="0">
                     <a:schemeClr val="bg2"/>
@@ -18735,14 +18514,14 @@
           <a:effectLst/>
           <a:extLst>
             <a:ext uri="{909E8E84-426E-40dd-AFC4-6F175D3DCCD1}">
-              <a14:hiddenFill xmlns="" xmlns:a14="http://schemas.microsoft.com/office/drawing/2010/main">
+              <a14:hiddenFill xmlns:a14="http://schemas.microsoft.com/office/drawing/2010/main" xmlns="">
                 <a:solidFill>
                   <a:schemeClr val="accent1"/>
                 </a:solidFill>
               </a14:hiddenFill>
             </a:ext>
             <a:ext uri="{AF507438-7753-43e0-B8FC-AC1667EBCBE1}">
-              <a14:hiddenEffects xmlns="" xmlns:a14="http://schemas.microsoft.com/office/drawing/2010/main">
+              <a14:hiddenEffects xmlns:a14="http://schemas.microsoft.com/office/drawing/2010/main" xmlns="">
                 <a:effectLst>
                   <a:outerShdw blurRad="63500" dist="35921" dir="2700000" algn="ctr" rotWithShape="0">
                     <a:schemeClr val="bg2"/>
@@ -18807,14 +18586,14 @@
           <a:effectLst/>
           <a:extLst>
             <a:ext uri="{909E8E84-426E-40dd-AFC4-6F175D3DCCD1}">
-              <a14:hiddenFill xmlns="" xmlns:a14="http://schemas.microsoft.com/office/drawing/2010/main">
+              <a14:hiddenFill xmlns:a14="http://schemas.microsoft.com/office/drawing/2010/main" xmlns="">
                 <a:solidFill>
                   <a:schemeClr val="accent1"/>
                 </a:solidFill>
               </a14:hiddenFill>
             </a:ext>
             <a:ext uri="{AF507438-7753-43e0-B8FC-AC1667EBCBE1}">
-              <a14:hiddenEffects xmlns="" xmlns:a14="http://schemas.microsoft.com/office/drawing/2010/main">
+              <a14:hiddenEffects xmlns:a14="http://schemas.microsoft.com/office/drawing/2010/main" xmlns="">
                 <a:effectLst>
                   <a:outerShdw blurRad="63500" dist="35921" dir="2700000" algn="ctr" rotWithShape="0">
                     <a:schemeClr val="bg2"/>
@@ -18875,14 +18654,14 @@
           <a:effectLst/>
           <a:extLst>
             <a:ext uri="{909E8E84-426E-40dd-AFC4-6F175D3DCCD1}">
-              <a14:hiddenFill xmlns="" xmlns:a14="http://schemas.microsoft.com/office/drawing/2010/main">
+              <a14:hiddenFill xmlns:a14="http://schemas.microsoft.com/office/drawing/2010/main" xmlns="">
                 <a:solidFill>
                   <a:schemeClr val="accent1"/>
                 </a:solidFill>
               </a14:hiddenFill>
             </a:ext>
             <a:ext uri="{AF507438-7753-43e0-B8FC-AC1667EBCBE1}">
-              <a14:hiddenEffects xmlns="" xmlns:a14="http://schemas.microsoft.com/office/drawing/2010/main">
+              <a14:hiddenEffects xmlns:a14="http://schemas.microsoft.com/office/drawing/2010/main" xmlns="">
                 <a:effectLst>
                   <a:outerShdw blurRad="63500" dist="35921" dir="2700000" algn="ctr" rotWithShape="0">
                     <a:schemeClr val="bg2"/>
@@ -19673,14 +19452,14 @@
           <a:ln/>
           <a:extLst>
             <a:ext uri="{909E8E84-426E-40dd-AFC4-6F175D3DCCD1}">
-              <a14:hiddenFill xmlns="" xmlns:a14="http://schemas.microsoft.com/office/drawing/2010/main">
+              <a14:hiddenFill xmlns:a14="http://schemas.microsoft.com/office/drawing/2010/main" xmlns="">
                 <a:solidFill>
                   <a:srgbClr val="FFFFFF"/>
                 </a:solidFill>
               </a14:hiddenFill>
             </a:ext>
             <a:ext uri="{91240B29-F687-4f45-9708-019B960494DF}">
-              <a14:hiddenLine xmlns="" xmlns:a14="http://schemas.microsoft.com/office/drawing/2010/main" w="9525">
+              <a14:hiddenLine xmlns:a14="http://schemas.microsoft.com/office/drawing/2010/main" xmlns="" w="9525">
                 <a:solidFill>
                   <a:srgbClr val="000000"/>
                 </a:solidFill>

--- a/topic06-structuring-programs/unit-06a-lectures/talk-2/b-stack.pptx
+++ b/topic06-structuring-programs/unit-06a-lectures/talk-2/b-stack.pptx
@@ -16907,21 +16907,8 @@
                   <a:srgbClr val="FFFF00"/>
                 </a:solidFill>
               </a:rPr>
-              <a:t>copies updated executable into </a:t>
+              <a:t>copies updated executable into common location. </a:t>
             </a:r>
-            <a:r>
-              <a:rPr lang="en-IE" sz="2400">
-                <a:solidFill>
-                  <a:srgbClr val="FFFF00"/>
-                </a:solidFill>
-              </a:rPr>
-              <a:t>common location. </a:t>
-            </a:r>
-            <a:endParaRPr lang="en-IE" sz="2400" dirty="0">
-              <a:solidFill>
-                <a:srgbClr val="FFFF00"/>
-              </a:solidFill>
-            </a:endParaRPr>
           </a:p>
         </p:txBody>
       </p:sp>
@@ -18489,8 +18476,8 @@
         </p:nvSpPr>
         <p:spPr bwMode="auto">
           <a:xfrm>
-            <a:off x="2018988" y="4449393"/>
-            <a:ext cx="2589088" cy="715089"/>
+            <a:off x="2018988" y="4602626"/>
+            <a:ext cx="2589088" cy="408623"/>
           </a:xfrm>
           <a:prstGeom prst="wedgeRoundRectCallout">
             <a:avLst>
@@ -18542,7 +18529,7 @@
           <a:p>
             <a:r>
               <a:rPr lang="en-US" dirty="0"/>
-              <a:t>Testing section (we don’t use) </a:t>
+              <a:t>Testing section</a:t>
             </a:r>
           </a:p>
         </p:txBody>
